--- a/Drone_detection_VKR_v3.pptx
+++ b/Drone_detection_VKR_v3.pptx
@@ -1437,7 +1437,7 @@
       </p:grpSpPr>
       <p:sp>
         <p:nvSpPr>
-          <p:cNvPr id="1515368136" name="Header Placeholder 1"/>
+          <p:cNvPr id="1699156321" name="Header Placeholder 1"/>
           <p:cNvSpPr>
             <a:spLocks noGrp="1"/>
           </p:cNvSpPr>
@@ -1471,7 +1471,7 @@
       </p:sp>
       <p:sp>
         <p:nvSpPr>
-          <p:cNvPr id="1142467347" name="Date Placeholder 2"/>
+          <p:cNvPr id="1462048588" name="Date Placeholder 2"/>
           <p:cNvSpPr>
             <a:spLocks noGrp="1"/>
           </p:cNvSpPr>
@@ -1505,7 +1505,7 @@
       </p:sp>
       <p:sp>
         <p:nvSpPr>
-          <p:cNvPr id="714786442" name="Date Placeholder 2"/>
+          <p:cNvPr id="1245560794" name="Date Placeholder 2"/>
           <p:cNvSpPr>
             <a:spLocks noGrp="1"/>
           </p:cNvSpPr>
@@ -1539,7 +1539,7 @@
       </p:sp>
       <p:sp>
         <p:nvSpPr>
-          <p:cNvPr id="806087180" name="Notes Placeholder 4"/>
+          <p:cNvPr id="222342555" name="Notes Placeholder 4"/>
           <p:cNvSpPr>
             <a:spLocks noGrp="1"/>
           </p:cNvSpPr>
@@ -1569,7 +1569,7 @@
       </p:sp>
       <p:sp>
         <p:nvSpPr>
-          <p:cNvPr id="1604587570" name="Footer Placeholder 5"/>
+          <p:cNvPr id="344632495" name="Footer Placeholder 5"/>
           <p:cNvSpPr>
             <a:spLocks noGrp="1"/>
           </p:cNvSpPr>
@@ -1603,7 +1603,7 @@
       </p:sp>
       <p:sp>
         <p:nvSpPr>
-          <p:cNvPr id="10030782" name="Slide Number Placeholder 6"/>
+          <p:cNvPr id="1499039319" name="Slide Number Placeholder 6"/>
           <p:cNvSpPr>
             <a:spLocks noGrp="1"/>
           </p:cNvSpPr>
@@ -1752,7 +1752,7 @@
       </p:grpSpPr>
       <p:sp>
         <p:nvSpPr>
-          <p:cNvPr id="43327105" name="Slide Image Placeholder 1"/>
+          <p:cNvPr id="458738016" name="Slide Image Placeholder 1"/>
           <p:cNvSpPr>
             <a:spLocks noChangeAspect="1" noGrp="1" noRot="1"/>
           </p:cNvSpPr>
@@ -1764,7 +1764,7 @@
       </p:sp>
       <p:sp>
         <p:nvSpPr>
-          <p:cNvPr id="1832265797" name="Notes Placeholder 2"/>
+          <p:cNvPr id="1976136552" name="Notes Placeholder 2"/>
           <p:cNvSpPr>
             <a:spLocks noGrp="1"/>
           </p:cNvSpPr>
@@ -1786,7 +1786,7 @@
       </p:sp>
       <p:sp>
         <p:nvSpPr>
-          <p:cNvPr id="1465939002" name="Slide Number Placeholder 3"/>
+          <p:cNvPr id="1685866746" name="Slide Number Placeholder 3"/>
           <p:cNvSpPr>
             <a:spLocks noGrp="1"/>
           </p:cNvSpPr>
@@ -1837,7 +1837,7 @@
       </p:grpSpPr>
       <p:sp>
         <p:nvSpPr>
-          <p:cNvPr id="1905489282" name="Slide Image Placeholder 1"/>
+          <p:cNvPr id="756827592" name="Slide Image Placeholder 1"/>
           <p:cNvSpPr>
             <a:spLocks noChangeAspect="1" noGrp="1" noRot="1"/>
           </p:cNvSpPr>
@@ -1849,7 +1849,7 @@
       </p:sp>
       <p:sp>
         <p:nvSpPr>
-          <p:cNvPr id="44327675" name="Notes Placeholder 2"/>
+          <p:cNvPr id="1024518803" name="Notes Placeholder 2"/>
           <p:cNvSpPr>
             <a:spLocks noGrp="1"/>
           </p:cNvSpPr>
@@ -1871,7 +1871,7 @@
       </p:sp>
       <p:sp>
         <p:nvSpPr>
-          <p:cNvPr id="480314313" name="Slide Number Placeholder 3"/>
+          <p:cNvPr id="461624751" name="Slide Number Placeholder 3"/>
           <p:cNvSpPr>
             <a:spLocks noGrp="1"/>
           </p:cNvSpPr>
@@ -1922,7 +1922,7 @@
       </p:grpSpPr>
       <p:sp>
         <p:nvSpPr>
-          <p:cNvPr id="1026551783" name="Slide Image Placeholder 1"/>
+          <p:cNvPr id="229105689" name="Slide Image Placeholder 1"/>
           <p:cNvSpPr>
             <a:spLocks noChangeAspect="1" noGrp="1" noRot="1"/>
           </p:cNvSpPr>
@@ -1934,7 +1934,7 @@
       </p:sp>
       <p:sp>
         <p:nvSpPr>
-          <p:cNvPr id="1335642443" name="Notes Placeholder 2"/>
+          <p:cNvPr id="1428553540" name="Notes Placeholder 2"/>
           <p:cNvSpPr>
             <a:spLocks noGrp="1"/>
           </p:cNvSpPr>
@@ -1956,7 +1956,7 @@
       </p:sp>
       <p:sp>
         <p:nvSpPr>
-          <p:cNvPr id="1176688740" name="Slide Number Placeholder 3"/>
+          <p:cNvPr id="115239173" name="Slide Number Placeholder 3"/>
           <p:cNvSpPr>
             <a:spLocks noGrp="1"/>
           </p:cNvSpPr>
@@ -2007,7 +2007,7 @@
       </p:grpSpPr>
       <p:sp>
         <p:nvSpPr>
-          <p:cNvPr id="60314633" name="Slide Image Placeholder 1"/>
+          <p:cNvPr id="1449154354" name="Slide Image Placeholder 1"/>
           <p:cNvSpPr>
             <a:spLocks noChangeAspect="1" noGrp="1" noRot="1"/>
           </p:cNvSpPr>
@@ -2019,7 +2019,7 @@
       </p:sp>
       <p:sp>
         <p:nvSpPr>
-          <p:cNvPr id="1864654974" name="Notes Placeholder 2"/>
+          <p:cNvPr id="1456114619" name="Notes Placeholder 2"/>
           <p:cNvSpPr>
             <a:spLocks noGrp="1"/>
           </p:cNvSpPr>
@@ -2041,7 +2041,7 @@
       </p:sp>
       <p:sp>
         <p:nvSpPr>
-          <p:cNvPr id="1386017413" name="Slide Number Placeholder 3"/>
+          <p:cNvPr id="728647032" name="Slide Number Placeholder 3"/>
           <p:cNvSpPr>
             <a:spLocks noGrp="1"/>
           </p:cNvSpPr>
@@ -2092,7 +2092,7 @@
       </p:grpSpPr>
       <p:sp>
         <p:nvSpPr>
-          <p:cNvPr id="946095511" name="Slide Image Placeholder 1"/>
+          <p:cNvPr id="1927941114" name="Slide Image Placeholder 1"/>
           <p:cNvSpPr>
             <a:spLocks noChangeAspect="1" noGrp="1" noRot="1"/>
           </p:cNvSpPr>
@@ -2104,7 +2104,7 @@
       </p:sp>
       <p:sp>
         <p:nvSpPr>
-          <p:cNvPr id="427696973" name="Notes Placeholder 2"/>
+          <p:cNvPr id="2130634537" name="Notes Placeholder 2"/>
           <p:cNvSpPr>
             <a:spLocks noGrp="1"/>
           </p:cNvSpPr>
@@ -2126,7 +2126,7 @@
       </p:sp>
       <p:sp>
         <p:nvSpPr>
-          <p:cNvPr id="1690185424" name="Slide Number Placeholder 3"/>
+          <p:cNvPr id="967527893" name="Slide Number Placeholder 3"/>
           <p:cNvSpPr>
             <a:spLocks noGrp="1"/>
           </p:cNvSpPr>
@@ -2177,7 +2177,7 @@
       </p:grpSpPr>
       <p:sp>
         <p:nvSpPr>
-          <p:cNvPr id="2094855726" name="Slide Image Placeholder 1"/>
+          <p:cNvPr id="454496083" name="Slide Image Placeholder 1"/>
           <p:cNvSpPr>
             <a:spLocks noChangeAspect="1" noGrp="1" noRot="1"/>
           </p:cNvSpPr>
@@ -2189,7 +2189,7 @@
       </p:sp>
       <p:sp>
         <p:nvSpPr>
-          <p:cNvPr id="814895490" name="Notes Placeholder 2"/>
+          <p:cNvPr id="1673252696" name="Notes Placeholder 2"/>
           <p:cNvSpPr>
             <a:spLocks noGrp="1"/>
           </p:cNvSpPr>
@@ -2211,7 +2211,7 @@
       </p:sp>
       <p:sp>
         <p:nvSpPr>
-          <p:cNvPr id="1303926384" name="Slide Number Placeholder 3"/>
+          <p:cNvPr id="538937196" name="Slide Number Placeholder 3"/>
           <p:cNvSpPr>
             <a:spLocks noGrp="1"/>
           </p:cNvSpPr>
@@ -2262,7 +2262,7 @@
       </p:grpSpPr>
       <p:sp>
         <p:nvSpPr>
-          <p:cNvPr id="1119623262" name="Slide Image Placeholder 1"/>
+          <p:cNvPr id="1448484671" name="Slide Image Placeholder 1"/>
           <p:cNvSpPr>
             <a:spLocks noChangeAspect="1" noGrp="1" noRot="1"/>
           </p:cNvSpPr>
@@ -2274,7 +2274,7 @@
       </p:sp>
       <p:sp>
         <p:nvSpPr>
-          <p:cNvPr id="283459721" name="Notes Placeholder 2"/>
+          <p:cNvPr id="530120043" name="Notes Placeholder 2"/>
           <p:cNvSpPr>
             <a:spLocks noGrp="1"/>
           </p:cNvSpPr>
@@ -2296,7 +2296,7 @@
       </p:sp>
       <p:sp>
         <p:nvSpPr>
-          <p:cNvPr id="1196457909" name="Slide Number Placeholder 3"/>
+          <p:cNvPr id="1280737150" name="Slide Number Placeholder 3"/>
           <p:cNvSpPr>
             <a:spLocks noGrp="1"/>
           </p:cNvSpPr>
@@ -2347,7 +2347,7 @@
       </p:grpSpPr>
       <p:sp>
         <p:nvSpPr>
-          <p:cNvPr id="2002355247" name="Slide Image Placeholder 1"/>
+          <p:cNvPr id="1472505733" name="Slide Image Placeholder 1"/>
           <p:cNvSpPr>
             <a:spLocks noChangeAspect="1" noGrp="1" noRot="1"/>
           </p:cNvSpPr>
@@ -2359,7 +2359,7 @@
       </p:sp>
       <p:sp>
         <p:nvSpPr>
-          <p:cNvPr id="1412801600" name="Notes Placeholder 2"/>
+          <p:cNvPr id="1861147093" name="Notes Placeholder 2"/>
           <p:cNvSpPr>
             <a:spLocks noGrp="1"/>
           </p:cNvSpPr>
@@ -2381,7 +2381,7 @@
       </p:sp>
       <p:sp>
         <p:nvSpPr>
-          <p:cNvPr id="1306723470" name="Slide Number Placeholder 3"/>
+          <p:cNvPr id="1776194372" name="Slide Number Placeholder 3"/>
           <p:cNvSpPr>
             <a:spLocks noGrp="1"/>
           </p:cNvSpPr>
@@ -2432,7 +2432,7 @@
       </p:grpSpPr>
       <p:sp>
         <p:nvSpPr>
-          <p:cNvPr id="1657606119" name="Slide Image Placeholder 1"/>
+          <p:cNvPr id="831066753" name="Slide Image Placeholder 1"/>
           <p:cNvSpPr>
             <a:spLocks noChangeAspect="1" noGrp="1" noRot="1"/>
           </p:cNvSpPr>
@@ -2444,7 +2444,7 @@
       </p:sp>
       <p:sp>
         <p:nvSpPr>
-          <p:cNvPr id="638453150" name="Notes Placeholder 2"/>
+          <p:cNvPr id="1637732257" name="Notes Placeholder 2"/>
           <p:cNvSpPr>
             <a:spLocks noGrp="1"/>
           </p:cNvSpPr>
@@ -2466,7 +2466,7 @@
       </p:sp>
       <p:sp>
         <p:nvSpPr>
-          <p:cNvPr id="64058834" name="Slide Number Placeholder 3"/>
+          <p:cNvPr id="755225016" name="Slide Number Placeholder 3"/>
           <p:cNvSpPr>
             <a:spLocks noGrp="1"/>
           </p:cNvSpPr>
@@ -2517,7 +2517,7 @@
       </p:grpSpPr>
       <p:sp>
         <p:nvSpPr>
-          <p:cNvPr id="315179480" name="Slide Image Placeholder 1"/>
+          <p:cNvPr id="944597498" name="Slide Image Placeholder 1"/>
           <p:cNvSpPr>
             <a:spLocks noChangeAspect="1" noGrp="1" noRot="1"/>
           </p:cNvSpPr>
@@ -2529,7 +2529,7 @@
       </p:sp>
       <p:sp>
         <p:nvSpPr>
-          <p:cNvPr id="445501510" name="Notes Placeholder 2"/>
+          <p:cNvPr id="376335566" name="Notes Placeholder 2"/>
           <p:cNvSpPr>
             <a:spLocks noGrp="1"/>
           </p:cNvSpPr>
@@ -2551,7 +2551,7 @@
       </p:sp>
       <p:sp>
         <p:nvSpPr>
-          <p:cNvPr id="575017918" name="Slide Number Placeholder 3"/>
+          <p:cNvPr id="1766624908" name="Slide Number Placeholder 3"/>
           <p:cNvSpPr>
             <a:spLocks noGrp="1"/>
           </p:cNvSpPr>
@@ -2602,7 +2602,7 @@
       </p:grpSpPr>
       <p:sp>
         <p:nvSpPr>
-          <p:cNvPr id="1764234559" name="Slide Image Placeholder 1"/>
+          <p:cNvPr id="1531282139" name="Slide Image Placeholder 1"/>
           <p:cNvSpPr>
             <a:spLocks noChangeAspect="1" noGrp="1" noRot="1"/>
           </p:cNvSpPr>
@@ -2614,7 +2614,7 @@
       </p:sp>
       <p:sp>
         <p:nvSpPr>
-          <p:cNvPr id="1551860486" name="Notes Placeholder 2"/>
+          <p:cNvPr id="1116757788" name="Notes Placeholder 2"/>
           <p:cNvSpPr>
             <a:spLocks noGrp="1"/>
           </p:cNvSpPr>
@@ -2636,7 +2636,7 @@
       </p:sp>
       <p:sp>
         <p:nvSpPr>
-          <p:cNvPr id="1235753938" name="Slide Number Placeholder 3"/>
+          <p:cNvPr id="467214598" name="Slide Number Placeholder 3"/>
           <p:cNvSpPr>
             <a:spLocks noGrp="1"/>
           </p:cNvSpPr>
@@ -2687,7 +2687,7 @@
       </p:grpSpPr>
       <p:sp>
         <p:nvSpPr>
-          <p:cNvPr id="864999139" name="Slide Image Placeholder 1"/>
+          <p:cNvPr id="1426386399" name="Slide Image Placeholder 1"/>
           <p:cNvSpPr>
             <a:spLocks noChangeAspect="1" noGrp="1" noRot="1"/>
           </p:cNvSpPr>
@@ -2699,7 +2699,7 @@
       </p:sp>
       <p:sp>
         <p:nvSpPr>
-          <p:cNvPr id="49885546" name="Notes Placeholder 2"/>
+          <p:cNvPr id="1336027722" name="Notes Placeholder 2"/>
           <p:cNvSpPr>
             <a:spLocks noGrp="1"/>
           </p:cNvSpPr>
@@ -2721,7 +2721,7 @@
       </p:sp>
       <p:sp>
         <p:nvSpPr>
-          <p:cNvPr id="784636958" name="Slide Number Placeholder 3"/>
+          <p:cNvPr id="600756728" name="Slide Number Placeholder 3"/>
           <p:cNvSpPr>
             <a:spLocks noGrp="1"/>
           </p:cNvSpPr>
@@ -2772,7 +2772,7 @@
       </p:grpSpPr>
       <p:sp>
         <p:nvSpPr>
-          <p:cNvPr id="1313460190" name="Slide Image Placeholder 1"/>
+          <p:cNvPr id="368152350" name="Slide Image Placeholder 1"/>
           <p:cNvSpPr>
             <a:spLocks noChangeAspect="1" noGrp="1" noRot="1"/>
           </p:cNvSpPr>
@@ -2784,7 +2784,7 @@
       </p:sp>
       <p:sp>
         <p:nvSpPr>
-          <p:cNvPr id="181658519" name="Notes Placeholder 2"/>
+          <p:cNvPr id="1709431976" name="Notes Placeholder 2"/>
           <p:cNvSpPr>
             <a:spLocks noGrp="1"/>
           </p:cNvSpPr>
@@ -2806,7 +2806,7 @@
       </p:sp>
       <p:sp>
         <p:nvSpPr>
-          <p:cNvPr id="1696793991" name="Slide Number Placeholder 3"/>
+          <p:cNvPr id="1309623107" name="Slide Number Placeholder 3"/>
           <p:cNvSpPr>
             <a:spLocks noGrp="1"/>
           </p:cNvSpPr>
@@ -2857,7 +2857,7 @@
       </p:grpSpPr>
       <p:sp>
         <p:nvSpPr>
-          <p:cNvPr id="93346835" name="Slide Image Placeholder 1"/>
+          <p:cNvPr id="1850927137" name="Slide Image Placeholder 1"/>
           <p:cNvSpPr>
             <a:spLocks noChangeAspect="1" noGrp="1" noRot="1"/>
           </p:cNvSpPr>
@@ -2869,7 +2869,7 @@
       </p:sp>
       <p:sp>
         <p:nvSpPr>
-          <p:cNvPr id="1765060085" name="Notes Placeholder 2"/>
+          <p:cNvPr id="1007603127" name="Notes Placeholder 2"/>
           <p:cNvSpPr>
             <a:spLocks noGrp="1"/>
           </p:cNvSpPr>
@@ -2891,7 +2891,7 @@
       </p:sp>
       <p:sp>
         <p:nvSpPr>
-          <p:cNvPr id="252124358" name="Slide Number Placeholder 3"/>
+          <p:cNvPr id="946151137" name="Slide Number Placeholder 3"/>
           <p:cNvSpPr>
             <a:spLocks noGrp="1"/>
           </p:cNvSpPr>
@@ -2942,7 +2942,7 @@
       </p:grpSpPr>
       <p:sp>
         <p:nvSpPr>
-          <p:cNvPr id="343445009" name="Slide Image Placeholder 1"/>
+          <p:cNvPr id="401141740" name="Slide Image Placeholder 1"/>
           <p:cNvSpPr>
             <a:spLocks noChangeAspect="1" noGrp="1" noRot="1"/>
           </p:cNvSpPr>
@@ -2954,7 +2954,7 @@
       </p:sp>
       <p:sp>
         <p:nvSpPr>
-          <p:cNvPr id="1203523867" name="Notes Placeholder 2"/>
+          <p:cNvPr id="1794295919" name="Notes Placeholder 2"/>
           <p:cNvSpPr>
             <a:spLocks noGrp="1"/>
           </p:cNvSpPr>
@@ -2976,7 +2976,7 @@
       </p:sp>
       <p:sp>
         <p:nvSpPr>
-          <p:cNvPr id="326543458" name="Slide Number Placeholder 3"/>
+          <p:cNvPr id="1024828203" name="Slide Number Placeholder 3"/>
           <p:cNvSpPr>
             <a:spLocks noGrp="1"/>
           </p:cNvSpPr>
@@ -3027,7 +3027,7 @@
       </p:grpSpPr>
       <p:sp>
         <p:nvSpPr>
-          <p:cNvPr id="2" name="Slide Image Placeholder 1"/>
+          <p:cNvPr id="9051573" name="Slide Image Placeholder 1"/>
           <p:cNvSpPr>
             <a:spLocks noChangeAspect="1" noGrp="1" noRot="1"/>
           </p:cNvSpPr>
@@ -3039,7 +3039,7 @@
       </p:sp>
       <p:sp>
         <p:nvSpPr>
-          <p:cNvPr id="3" name="Notes Placeholder 2"/>
+          <p:cNvPr id="619166400" name="Notes Placeholder 2"/>
           <p:cNvSpPr>
             <a:spLocks noGrp="1"/>
           </p:cNvSpPr>
@@ -3061,7 +3061,7 @@
       </p:sp>
       <p:sp>
         <p:nvSpPr>
-          <p:cNvPr id="4" name="Slide Number Placeholder 3"/>
+          <p:cNvPr id="1079354710" name="Slide Number Placeholder 3"/>
           <p:cNvSpPr>
             <a:spLocks noGrp="1"/>
           </p:cNvSpPr>
@@ -3426,7 +3426,7 @@
       </p:grpSpPr>
       <p:sp>
         <p:nvSpPr>
-          <p:cNvPr id="1104110532" name="Text 1"/>
+          <p:cNvPr id="2028673370" name="Text 1"/>
           <p:cNvSpPr/>
           <p:nvPr/>
         </p:nvSpPr>
@@ -3466,7 +3466,7 @@
       </p:sp>
       <p:sp>
         <p:nvSpPr>
-          <p:cNvPr id="2085336980" name="Text 2"/>
+          <p:cNvPr id="1606211342" name="Text 2"/>
           <p:cNvSpPr/>
           <p:nvPr/>
         </p:nvSpPr>
@@ -3537,7 +3537,7 @@
       </p:sp>
       <p:sp>
         <p:nvSpPr>
-          <p:cNvPr id="1612588979" name="Text 3"/>
+          <p:cNvPr id="1188847720" name="Text 3"/>
           <p:cNvSpPr/>
           <p:nvPr/>
         </p:nvSpPr>
@@ -3577,7 +3577,7 @@
       </p:sp>
       <p:pic>
         <p:nvPicPr>
-          <p:cNvPr id="759145490" name="Рисунок 8"/>
+          <p:cNvPr id="1425124438" name="Рисунок 8"/>
           <p:cNvPicPr/>
           <p:nvPr/>
         </p:nvPicPr>
@@ -3601,7 +3601,7 @@
       </p:pic>
       <p:sp>
         <p:nvSpPr>
-          <p:cNvPr id="254455316" name="Rectangle 6"/>
+          <p:cNvPr id="961210711" name="Rectangle 6"/>
           <p:cNvSpPr>
             <a:spLocks noChangeArrowheads="1"/>
           </p:cNvSpPr>
@@ -3753,7 +3753,7 @@
       </p:grpSpPr>
       <p:sp>
         <p:nvSpPr>
-          <p:cNvPr id="198565394" name="Text 0"/>
+          <p:cNvPr id="1715480834" name="Text 0"/>
           <p:cNvSpPr/>
           <p:nvPr/>
         </p:nvSpPr>
@@ -3793,7 +3793,7 @@
       </p:sp>
       <p:graphicFrame>
         <p:nvGraphicFramePr>
-          <p:cNvPr id="1685170120" name="Table 0"/>
+          <p:cNvPr id="955173043" name="Table 0"/>
           <p:cNvGraphicFramePr>
             <a:graphicFrameLocks xmlns:a="http://schemas.openxmlformats.org/drawingml/2006/main" noGrp="1"/>
           </p:cNvGraphicFramePr>
@@ -5535,7 +5535,7 @@
       </p:graphicFrame>
       <p:sp>
         <p:nvSpPr>
-          <p:cNvPr id="997317354" name="Text 1"/>
+          <p:cNvPr id="1509862266" name="Text 1"/>
           <p:cNvSpPr/>
           <p:nvPr/>
         </p:nvSpPr>
@@ -5575,7 +5575,7 @@
       </p:sp>
       <p:sp>
         <p:nvSpPr>
-          <p:cNvPr id="1187491471" name="Text 3"/>
+          <p:cNvPr id="690030460" name="Text 3"/>
           <p:cNvSpPr/>
           <p:nvPr/>
         </p:nvSpPr>
@@ -5655,7 +5655,7 @@
       </p:grpSpPr>
       <p:sp>
         <p:nvSpPr>
-          <p:cNvPr id="1029335220" name="Text 0"/>
+          <p:cNvPr id="941029955" name="Text 0"/>
           <p:cNvSpPr/>
           <p:nvPr/>
         </p:nvSpPr>
@@ -5695,7 +5695,7 @@
       </p:sp>
       <p:sp>
         <p:nvSpPr>
-          <p:cNvPr id="1267687083" name="Text 1"/>
+          <p:cNvPr id="1618719663" name="Text 1"/>
           <p:cNvSpPr/>
           <p:nvPr/>
         </p:nvSpPr>
@@ -5760,7 +5760,7 @@
       </p:sp>
       <p:sp>
         <p:nvSpPr>
-          <p:cNvPr id="801734472" name="Text 6"/>
+          <p:cNvPr id="1651837311" name="Text 6"/>
           <p:cNvSpPr/>
           <p:nvPr/>
         </p:nvSpPr>
@@ -5800,7 +5800,7 @@
       </p:sp>
       <p:sp>
         <p:nvSpPr>
-          <p:cNvPr id="450316576" name=""/>
+          <p:cNvPr id="340963457" name=""/>
           <p:cNvSpPr/>
           <p:nvPr/>
         </p:nvSpPr>
@@ -5846,7 +5846,7 @@
       </p:sp>
       <p:sp>
         <p:nvSpPr>
-          <p:cNvPr id="1639064927" name=""/>
+          <p:cNvPr id="1461580991" name=""/>
           <p:cNvSpPr txBox="1"/>
           <p:nvPr/>
         </p:nvSpPr>
@@ -5959,7 +5959,7 @@
       </p:sp>
       <p:sp>
         <p:nvSpPr>
-          <p:cNvPr id="1519979987" name=""/>
+          <p:cNvPr id="1482893812" name=""/>
           <p:cNvSpPr txBox="1"/>
           <p:nvPr/>
         </p:nvSpPr>
@@ -6052,7 +6052,7 @@
       </p:sp>
       <p:sp>
         <p:nvSpPr>
-          <p:cNvPr id="1276806304" name=""/>
+          <p:cNvPr id="598936174" name=""/>
           <p:cNvSpPr txBox="1"/>
           <p:nvPr/>
         </p:nvSpPr>
@@ -6145,7 +6145,7 @@
       </p:sp>
       <p:sp>
         <p:nvSpPr>
-          <p:cNvPr id="1417257615" name=""/>
+          <p:cNvPr id="471837448" name=""/>
           <p:cNvSpPr txBox="1"/>
           <p:nvPr/>
         </p:nvSpPr>
@@ -6285,7 +6285,7 @@
       </p:sp>
       <p:sp>
         <p:nvSpPr>
-          <p:cNvPr id="239066290" name=""/>
+          <p:cNvPr id="1514146071" name=""/>
           <p:cNvSpPr txBox="1"/>
           <p:nvPr/>
         </p:nvSpPr>
@@ -6524,7 +6524,7 @@
       </p:sp>
       <p:sp>
         <p:nvSpPr>
-          <p:cNvPr id="505808261" name=""/>
+          <p:cNvPr id="906850869" name=""/>
           <p:cNvSpPr txBox="1"/>
           <p:nvPr/>
         </p:nvSpPr>
@@ -6774,7 +6774,7 @@
       </p:sp>
       <p:sp>
         <p:nvSpPr>
-          <p:cNvPr id="1645170882" name="Text 1"/>
+          <p:cNvPr id="500019150" name="Text 1"/>
           <p:cNvSpPr/>
           <p:nvPr/>
         </p:nvSpPr>
@@ -6836,7 +6836,7 @@
       </p:sp>
       <p:sp>
         <p:nvSpPr>
-          <p:cNvPr id="1994695907" name=""/>
+          <p:cNvPr id="1670689513" name=""/>
           <p:cNvSpPr txBox="1"/>
           <p:nvPr/>
         </p:nvSpPr>
@@ -6959,7 +6959,7 @@
       </p:sp>
       <p:sp>
         <p:nvSpPr>
-          <p:cNvPr id="314997077" name=""/>
+          <p:cNvPr id="2099104175" name=""/>
           <p:cNvSpPr txBox="1"/>
           <p:nvPr/>
         </p:nvSpPr>
@@ -7082,7 +7082,7 @@
       </p:sp>
       <p:sp>
         <p:nvSpPr>
-          <p:cNvPr id="364018520" name=""/>
+          <p:cNvPr id="1553033790" name=""/>
           <p:cNvSpPr txBox="1"/>
           <p:nvPr/>
         </p:nvSpPr>
@@ -7199,7 +7199,7 @@
       </p:sp>
       <p:sp>
         <p:nvSpPr>
-          <p:cNvPr id="1153427468" name="Text 1"/>
+          <p:cNvPr id="653908774" name="Text 1"/>
           <p:cNvSpPr/>
           <p:nvPr/>
         </p:nvSpPr>
@@ -7312,7 +7312,7 @@
       </p:grpSpPr>
       <p:sp>
         <p:nvSpPr>
-          <p:cNvPr id="829295922" name="Text 0"/>
+          <p:cNvPr id="1394245602" name="Text 0"/>
           <p:cNvSpPr/>
           <p:nvPr/>
         </p:nvSpPr>
@@ -7363,7 +7363,7 @@
       </p:sp>
       <p:sp>
         <p:nvSpPr>
-          <p:cNvPr id="1384146711" name="Text 1"/>
+          <p:cNvPr id="782350690" name="Text 1"/>
           <p:cNvSpPr/>
           <p:nvPr/>
         </p:nvSpPr>
@@ -7403,7 +7403,7 @@
       </p:sp>
       <p:graphicFrame>
         <p:nvGraphicFramePr>
-          <p:cNvPr id="1158678222" name="Table 0"/>
+          <p:cNvPr id="1547292156" name="Table 0"/>
           <p:cNvGraphicFramePr>
             <a:graphicFrameLocks xmlns:a="http://schemas.openxmlformats.org/drawingml/2006/main" noGrp="1"/>
           </p:cNvGraphicFramePr>
@@ -8073,7 +8073,7 @@
       </p:graphicFrame>
       <p:sp>
         <p:nvSpPr>
-          <p:cNvPr id="1750219188" name="Text 2"/>
+          <p:cNvPr id="1937645679" name="Text 2"/>
           <p:cNvSpPr/>
           <p:nvPr/>
         </p:nvSpPr>
@@ -8113,7 +8113,7 @@
       </p:sp>
       <p:graphicFrame>
         <p:nvGraphicFramePr>
-          <p:cNvPr id="1590099089" name="Table 1"/>
+          <p:cNvPr id="1347445351" name="Table 1"/>
           <p:cNvGraphicFramePr>
             <a:graphicFrameLocks xmlns:a="http://schemas.openxmlformats.org/drawingml/2006/main" noGrp="1"/>
           </p:cNvGraphicFramePr>
@@ -8783,7 +8783,7 @@
       </p:graphicFrame>
       <p:sp>
         <p:nvSpPr>
-          <p:cNvPr id="474986942" name="Text 4"/>
+          <p:cNvPr id="915934939" name="Text 4"/>
           <p:cNvSpPr/>
           <p:nvPr/>
         </p:nvSpPr>
@@ -8823,7 +8823,7 @@
       </p:sp>
       <p:sp>
         <p:nvSpPr>
-          <p:cNvPr id="1276806516" name="Text 1"/>
+          <p:cNvPr id="1230939503" name="Text 1"/>
           <p:cNvSpPr/>
           <p:nvPr/>
         </p:nvSpPr>
@@ -8863,7 +8863,7 @@
       </p:sp>
       <p:graphicFrame>
         <p:nvGraphicFramePr>
-          <p:cNvPr id="669299429" name="Table 0"/>
+          <p:cNvPr id="344756823" name="Table 0"/>
           <p:cNvGraphicFramePr>
             <a:graphicFrameLocks xmlns:a="http://schemas.openxmlformats.org/drawingml/2006/main"/>
           </p:cNvGraphicFramePr>
@@ -9533,7 +9533,7 @@
       </p:graphicFrame>
       <p:sp>
         <p:nvSpPr>
-          <p:cNvPr id="271923959" name="Text 2"/>
+          <p:cNvPr id="123087015" name="Text 2"/>
           <p:cNvSpPr/>
           <p:nvPr/>
         </p:nvSpPr>
@@ -9573,7 +9573,7 @@
       </p:sp>
       <p:graphicFrame>
         <p:nvGraphicFramePr>
-          <p:cNvPr id="823081535" name="Table 1"/>
+          <p:cNvPr id="1615279257" name="Table 1"/>
           <p:cNvGraphicFramePr>
             <a:graphicFrameLocks xmlns:a="http://schemas.openxmlformats.org/drawingml/2006/main"/>
           </p:cNvGraphicFramePr>
@@ -10294,7 +10294,7 @@
       </p:grpSpPr>
       <p:sp>
         <p:nvSpPr>
-          <p:cNvPr id="1744237440" name="Text 0"/>
+          <p:cNvPr id="947780432" name="Text 0"/>
           <p:cNvSpPr/>
           <p:nvPr/>
         </p:nvSpPr>
@@ -10337,7 +10337,7 @@
       </p:sp>
       <p:graphicFrame>
         <p:nvGraphicFramePr>
-          <p:cNvPr id="908697624" name="Chart 0" descr=""/>
+          <p:cNvPr id="1108417745" name="Chart 0" descr=""/>
           <p:cNvGraphicFramePr>
             <a:graphicFrameLocks xmlns:a="http://schemas.openxmlformats.org/drawingml/2006/main"/>
           </p:cNvGraphicFramePr>
@@ -10355,7 +10355,7 @@
       </p:graphicFrame>
       <p:graphicFrame>
         <p:nvGraphicFramePr>
-          <p:cNvPr id="1380837190" name="Chart 1" descr=""/>
+          <p:cNvPr id="789944894" name="Chart 1" descr=""/>
           <p:cNvGraphicFramePr>
             <a:graphicFrameLocks xmlns:a="http://schemas.openxmlformats.org/drawingml/2006/main"/>
           </p:cNvGraphicFramePr>
@@ -10373,7 +10373,7 @@
       </p:graphicFrame>
       <p:sp>
         <p:nvSpPr>
-          <p:cNvPr id="886005028" name="Text 2"/>
+          <p:cNvPr id="1160190279" name="Text 2"/>
           <p:cNvSpPr/>
           <p:nvPr/>
         </p:nvSpPr>
@@ -10413,7 +10413,7 @@
       </p:sp>
       <p:sp>
         <p:nvSpPr>
-          <p:cNvPr id="1954174416" name=""/>
+          <p:cNvPr id="1236310684" name=""/>
           <p:cNvSpPr txBox="1"/>
           <p:nvPr/>
         </p:nvSpPr>
@@ -10496,7 +10496,7 @@
       </p:sp>
       <p:sp>
         <p:nvSpPr>
-          <p:cNvPr id="1766393085" name=""/>
+          <p:cNvPr id="223197006" name=""/>
           <p:cNvSpPr txBox="1"/>
           <p:nvPr/>
         </p:nvSpPr>
@@ -10612,7 +10612,7 @@
       </p:grpSpPr>
       <p:sp>
         <p:nvSpPr>
-          <p:cNvPr id="1557182562" name="TextBox 1"/>
+          <p:cNvPr id="1155250140" name="TextBox 1"/>
           <p:cNvSpPr txBox="1"/>
           <p:nvPr/>
         </p:nvSpPr>
@@ -10652,7 +10652,7 @@
       </p:sp>
       <p:graphicFrame>
         <p:nvGraphicFramePr>
-          <p:cNvPr id="335679245" name="Table 2"/>
+          <p:cNvPr id="456546116" name="Table 2"/>
           <p:cNvGraphicFramePr>
             <a:graphicFrameLocks xmlns:a="http://schemas.openxmlformats.org/drawingml/2006/main" noGrp="1"/>
           </p:cNvGraphicFramePr>
@@ -11648,7 +11648,7 @@
       </p:graphicFrame>
       <p:sp>
         <p:nvSpPr>
-          <p:cNvPr id="76029390" name="TextBox 3"/>
+          <p:cNvPr id="1662983318" name="TextBox 3"/>
           <p:cNvSpPr txBox="1"/>
           <p:nvPr/>
         </p:nvSpPr>
@@ -11688,7 +11688,7 @@
       </p:sp>
       <p:sp>
         <p:nvSpPr>
-          <p:cNvPr id="2074124039" name="TextBox 1880484338"/>
+          <p:cNvPr id="458244450" name="TextBox 1880484338"/>
           <p:cNvSpPr txBox="1"/>
           <p:nvPr/>
         </p:nvSpPr>
@@ -11756,7 +11756,7 @@
       </p:grpSpPr>
       <p:sp>
         <p:nvSpPr>
-          <p:cNvPr id="946419738" name=""/>
+          <p:cNvPr id="1957305055" name=""/>
           <p:cNvSpPr txBox="1"/>
           <p:nvPr/>
         </p:nvSpPr>
@@ -11865,7 +11865,7 @@
       </p:sp>
       <p:sp>
         <p:nvSpPr>
-          <p:cNvPr id="1007198497" name=""/>
+          <p:cNvPr id="139198703" name=""/>
           <p:cNvSpPr txBox="1"/>
           <p:nvPr/>
         </p:nvSpPr>
@@ -11904,7 +11904,7 @@
       </p:sp>
       <p:sp>
         <p:nvSpPr>
-          <p:cNvPr id="639657326" name="TextBox 1880484338"/>
+          <p:cNvPr id="115115245" name="TextBox 1880484338"/>
           <p:cNvSpPr txBox="1"/>
           <p:nvPr/>
         </p:nvSpPr>
@@ -11979,7 +11979,7 @@
       </p:grpSpPr>
       <p:sp>
         <p:nvSpPr>
-          <p:cNvPr id="1686514722" name="Text 0"/>
+          <p:cNvPr id="1818669376" name="Text 0"/>
           <p:cNvSpPr/>
           <p:nvPr/>
         </p:nvSpPr>
@@ -12022,7 +12022,7 @@
       </p:sp>
       <p:sp>
         <p:nvSpPr>
-          <p:cNvPr id="1945608615" name="TextBox 996258393"/>
+          <p:cNvPr id="627869409" name="TextBox 996258393"/>
           <p:cNvSpPr txBox="1"/>
           <p:nvPr/>
         </p:nvSpPr>
@@ -12097,7 +12097,7 @@
       </p:grpSpPr>
       <p:sp>
         <p:nvSpPr>
-          <p:cNvPr id="1406142933" name="Text 0"/>
+          <p:cNvPr id="1424492258" name="Text 0"/>
           <p:cNvSpPr/>
           <p:nvPr/>
         </p:nvSpPr>
@@ -12140,7 +12140,7 @@
       </p:sp>
       <p:sp>
         <p:nvSpPr>
-          <p:cNvPr id="397348340" name="Text 1"/>
+          <p:cNvPr id="1659436432" name="Text 1"/>
           <p:cNvSpPr/>
           <p:nvPr/>
         </p:nvSpPr>
@@ -12379,7 +12379,7 @@
       </p:sp>
       <p:sp>
         <p:nvSpPr>
-          <p:cNvPr id="489951959" name="Text 5"/>
+          <p:cNvPr id="83881059" name="Text 5"/>
           <p:cNvSpPr/>
           <p:nvPr/>
         </p:nvSpPr>
@@ -12459,7 +12459,7 @@
       </p:grpSpPr>
       <p:sp>
         <p:nvSpPr>
-          <p:cNvPr id="1369285394" name="Text 8"/>
+          <p:cNvPr id="1252625348" name="Text 8"/>
           <p:cNvSpPr/>
           <p:nvPr/>
         </p:nvSpPr>
@@ -12499,7 +12499,7 @@
       </p:sp>
       <p:sp>
         <p:nvSpPr>
-          <p:cNvPr id="1230260017" name="TextBox 760906410"/>
+          <p:cNvPr id="463129111" name="TextBox 760906410"/>
           <p:cNvSpPr txBox="1"/>
           <p:nvPr/>
         </p:nvSpPr>
@@ -12641,7 +12641,7 @@
       </p:sp>
       <p:sp>
         <p:nvSpPr>
-          <p:cNvPr id="1752124880" name="TextBox 760906411"/>
+          <p:cNvPr id="1598887106" name="TextBox 760906411"/>
           <p:cNvSpPr txBox="1"/>
           <p:nvPr/>
         </p:nvSpPr>
@@ -12783,7 +12783,7 @@
       </p:sp>
       <p:sp>
         <p:nvSpPr>
-          <p:cNvPr id="473353351" name="TextBox 760906412"/>
+          <p:cNvPr id="1651563126" name="TextBox 760906412"/>
           <p:cNvSpPr txBox="1"/>
           <p:nvPr/>
         </p:nvSpPr>
@@ -12928,7 +12928,7 @@
       </p:sp>
       <p:sp>
         <p:nvSpPr>
-          <p:cNvPr id="648214052" name="TextBox 1475548509"/>
+          <p:cNvPr id="290812424" name="TextBox 1475548509"/>
           <p:cNvSpPr txBox="1"/>
           <p:nvPr/>
         </p:nvSpPr>
@@ -13005,7 +13005,7 @@
       </p:grpSpPr>
       <p:sp>
         <p:nvSpPr>
-          <p:cNvPr id="1430355915" name="Text 0"/>
+          <p:cNvPr id="1564027241" name="Text 0"/>
           <p:cNvSpPr/>
           <p:nvPr/>
         </p:nvSpPr>
@@ -13048,7 +13048,7 @@
       </p:sp>
       <p:sp>
         <p:nvSpPr>
-          <p:cNvPr id="992902533" name="Text 1"/>
+          <p:cNvPr id="1211135920" name="Text 1"/>
           <p:cNvSpPr/>
           <p:nvPr/>
         </p:nvSpPr>
@@ -13164,7 +13164,7 @@
       </p:sp>
       <p:sp>
         <p:nvSpPr>
-          <p:cNvPr id="926773485" name="Text 4"/>
+          <p:cNvPr id="1738971543" name="Text 4"/>
           <p:cNvSpPr/>
           <p:nvPr/>
         </p:nvSpPr>
@@ -13193,7 +13193,7 @@
       </p:sp>
       <p:sp>
         <p:nvSpPr>
-          <p:cNvPr id="1190151404" name="Text 6"/>
+          <p:cNvPr id="1574389376" name="Text 6"/>
           <p:cNvSpPr/>
           <p:nvPr/>
         </p:nvSpPr>
@@ -13305,7 +13305,7 @@
       </p:sp>
       <p:sp>
         <p:nvSpPr>
-          <p:cNvPr id="954728960" name="Text 7"/>
+          <p:cNvPr id="170504241" name="Text 7"/>
           <p:cNvSpPr/>
           <p:nvPr/>
         </p:nvSpPr>
@@ -13345,7 +13345,7 @@
       </p:sp>
       <p:sp>
         <p:nvSpPr>
-          <p:cNvPr id="991941252" name="Text 1"/>
+          <p:cNvPr id="1874706702" name="Text 1"/>
           <p:cNvSpPr/>
           <p:nvPr/>
         </p:nvSpPr>
@@ -13461,7 +13461,7 @@
       </p:sp>
       <p:sp>
         <p:nvSpPr>
-          <p:cNvPr id="249746204" name="Text 6"/>
+          <p:cNvPr id="899370266" name="Text 6"/>
           <p:cNvSpPr/>
           <p:nvPr/>
         </p:nvSpPr>
@@ -13602,7 +13602,7 @@
       </p:grpSpPr>
       <p:sp>
         <p:nvSpPr>
-          <p:cNvPr id="780597452" name="Text 0"/>
+          <p:cNvPr id="1105106182" name="Text 0"/>
           <p:cNvSpPr/>
           <p:nvPr/>
         </p:nvSpPr>
@@ -13642,7 +13642,7 @@
       </p:sp>
       <p:sp>
         <p:nvSpPr>
-          <p:cNvPr id="1662143931" name="Shape 1"/>
+          <p:cNvPr id="917288473" name="Shape 1"/>
           <p:cNvSpPr/>
           <p:nvPr/>
         </p:nvSpPr>
@@ -13676,7 +13676,7 @@
       </p:sp>
       <p:sp>
         <p:nvSpPr>
-          <p:cNvPr id="813247632" name="Text 2"/>
+          <p:cNvPr id="336822000" name="Text 2"/>
           <p:cNvSpPr/>
           <p:nvPr/>
         </p:nvSpPr>
@@ -13740,7 +13740,7 @@
       </p:sp>
       <p:sp>
         <p:nvSpPr>
-          <p:cNvPr id="942685151" name="Shape 3"/>
+          <p:cNvPr id="1177833655" name="Shape 3"/>
           <p:cNvSpPr/>
           <p:nvPr/>
         </p:nvSpPr>
@@ -13774,7 +13774,7 @@
       </p:sp>
       <p:sp>
         <p:nvSpPr>
-          <p:cNvPr id="481369367" name="Text 4"/>
+          <p:cNvPr id="1980287450" name="Text 4"/>
           <p:cNvSpPr/>
           <p:nvPr/>
         </p:nvSpPr>
@@ -13835,7 +13835,7 @@
       </p:sp>
       <p:sp>
         <p:nvSpPr>
-          <p:cNvPr id="81906722" name="Shape 5"/>
+          <p:cNvPr id="77174060" name="Shape 5"/>
           <p:cNvSpPr/>
           <p:nvPr/>
         </p:nvSpPr>
@@ -13869,7 +13869,7 @@
       </p:sp>
       <p:sp>
         <p:nvSpPr>
-          <p:cNvPr id="1102334758" name="Text 6"/>
+          <p:cNvPr id="1853818242" name="Text 6"/>
           <p:cNvSpPr/>
           <p:nvPr/>
         </p:nvSpPr>
@@ -13954,7 +13954,7 @@
       </p:sp>
       <p:sp>
         <p:nvSpPr>
-          <p:cNvPr id="7779126" name="Shape 7"/>
+          <p:cNvPr id="258633010" name="Shape 7"/>
           <p:cNvSpPr/>
           <p:nvPr/>
         </p:nvSpPr>
@@ -13988,7 +13988,7 @@
       </p:sp>
       <p:sp>
         <p:nvSpPr>
-          <p:cNvPr id="1633833687" name="Text 8"/>
+          <p:cNvPr id="1583280806" name="Text 8"/>
           <p:cNvSpPr/>
           <p:nvPr/>
         </p:nvSpPr>
@@ -14073,7 +14073,7 @@
       </p:sp>
       <p:sp>
         <p:nvSpPr>
-          <p:cNvPr id="1380645675" name="Shape 9"/>
+          <p:cNvPr id="2069953642" name="Shape 9"/>
           <p:cNvSpPr/>
           <p:nvPr/>
         </p:nvSpPr>
@@ -14106,7 +14106,7 @@
       </p:sp>
       <p:sp>
         <p:nvSpPr>
-          <p:cNvPr id="910139403" name="Shape 10"/>
+          <p:cNvPr id="1124715796" name="Shape 10"/>
           <p:cNvSpPr/>
           <p:nvPr/>
         </p:nvSpPr>
@@ -14139,7 +14139,7 @@
       </p:sp>
       <p:sp>
         <p:nvSpPr>
-          <p:cNvPr id="1849031946" name="Shape 11"/>
+          <p:cNvPr id="1846407026" name="Shape 11"/>
           <p:cNvSpPr/>
           <p:nvPr/>
         </p:nvSpPr>
@@ -14172,7 +14172,7 @@
       </p:sp>
       <p:sp>
         <p:nvSpPr>
-          <p:cNvPr id="553125012" name="Shape 12"/>
+          <p:cNvPr id="1072915148" name="Shape 12"/>
           <p:cNvSpPr/>
           <p:nvPr/>
         </p:nvSpPr>
@@ -14205,7 +14205,7 @@
       </p:sp>
       <p:sp>
         <p:nvSpPr>
-          <p:cNvPr id="1509184695" name="Shape 13"/>
+          <p:cNvPr id="255547585" name="Shape 13"/>
           <p:cNvSpPr/>
           <p:nvPr/>
         </p:nvSpPr>
@@ -14239,7 +14239,7 @@
       </p:sp>
       <p:sp>
         <p:nvSpPr>
-          <p:cNvPr id="121329629" name="Text 14"/>
+          <p:cNvPr id="1936194923" name="Text 14"/>
           <p:cNvSpPr/>
           <p:nvPr/>
         </p:nvSpPr>
@@ -14282,7 +14282,7 @@
       </p:sp>
       <p:sp>
         <p:nvSpPr>
-          <p:cNvPr id="773199980" name="Shape 15"/>
+          <p:cNvPr id="984926591" name="Shape 15"/>
           <p:cNvSpPr/>
           <p:nvPr/>
         </p:nvSpPr>
@@ -14315,7 +14315,7 @@
       </p:sp>
       <p:sp>
         <p:nvSpPr>
-          <p:cNvPr id="968118271" name="Shape 16"/>
+          <p:cNvPr id="908384460" name="Shape 16"/>
           <p:cNvSpPr/>
           <p:nvPr/>
         </p:nvSpPr>
@@ -14349,7 +14349,7 @@
       </p:sp>
       <p:sp>
         <p:nvSpPr>
-          <p:cNvPr id="1730115041" name="Text 17"/>
+          <p:cNvPr id="895577778" name="Text 17"/>
           <p:cNvSpPr/>
           <p:nvPr/>
         </p:nvSpPr>
@@ -14392,7 +14392,7 @@
       </p:sp>
       <p:sp>
         <p:nvSpPr>
-          <p:cNvPr id="1115390431" name="Text 19"/>
+          <p:cNvPr id="2139554125" name="Text 19"/>
           <p:cNvSpPr/>
           <p:nvPr/>
         </p:nvSpPr>
@@ -14472,7 +14472,7 @@
       </p:grpSpPr>
       <p:sp>
         <p:nvSpPr>
-          <p:cNvPr id="1493455114" name="Text 0"/>
+          <p:cNvPr id="219392718" name="Text 0"/>
           <p:cNvSpPr/>
           <p:nvPr/>
         </p:nvSpPr>
@@ -14523,7 +14523,7 @@
       </p:sp>
       <p:sp>
         <p:nvSpPr>
-          <p:cNvPr id="740270647" name="Text 38"/>
+          <p:cNvPr id="1514671230" name="Text 38"/>
           <p:cNvSpPr/>
           <p:nvPr/>
         </p:nvSpPr>
@@ -14563,7 +14563,7 @@
       </p:sp>
       <p:pic>
         <p:nvPicPr>
-          <p:cNvPr id="592692637" name=""/>
+          <p:cNvPr id="177432771" name=""/>
           <p:cNvPicPr>
             <a:picLocks noChangeAspect="1"/>
           </p:cNvPicPr>
@@ -14619,7 +14619,7 @@
       </p:grpSpPr>
       <p:sp>
         <p:nvSpPr>
-          <p:cNvPr id="598772569" name="TextBox 1"/>
+          <p:cNvPr id="372933381" name="TextBox 1"/>
           <p:cNvSpPr txBox="1"/>
           <p:nvPr/>
         </p:nvSpPr>
@@ -14664,14 +14664,14 @@
       </p:sp>
       <p:sp>
         <p:nvSpPr>
-          <p:cNvPr id="1913839755" name="TextBox 1746804899"/>
+          <p:cNvPr id="625308852" name="TextBox 1746804899"/>
           <p:cNvSpPr txBox="1"/>
           <p:nvPr/>
         </p:nvSpPr>
         <p:spPr bwMode="auto">
           <a:xfrm flipH="0" flipV="0">
             <a:off x="457200" y="1142997"/>
-            <a:ext cx="5493237" cy="3336071"/>
+            <a:ext cx="5493236" cy="3336071"/>
           </a:xfrm>
           <a:prstGeom prst="rect">
             <a:avLst/>
@@ -15000,7 +15000,7 @@
       </p:sp>
       <p:sp>
         <p:nvSpPr>
-          <p:cNvPr id="1757951281" name="TextBox 1746804901"/>
+          <p:cNvPr id="50722455" name="TextBox 1746804901"/>
           <p:cNvSpPr txBox="1"/>
           <p:nvPr/>
         </p:nvSpPr>
@@ -15035,7 +15035,7 @@
       </p:sp>
       <p:sp>
         <p:nvSpPr>
-          <p:cNvPr id="249658614" name=""/>
+          <p:cNvPr id="1758607006" name=""/>
           <p:cNvSpPr/>
           <p:nvPr/>
         </p:nvSpPr>
@@ -15296,7 +15296,7 @@
       </p:sp>
       <p:sp>
         <p:nvSpPr>
-          <p:cNvPr id="334088548" name="TextBox 1298020582"/>
+          <p:cNvPr id="451368552" name="TextBox 1298020582"/>
           <p:cNvSpPr txBox="1"/>
           <p:nvPr/>
         </p:nvSpPr>
@@ -15917,7 +15917,7 @@
       </p:sp>
       <p:sp>
         <p:nvSpPr>
-          <p:cNvPr id="1307606190" name=""/>
+          <p:cNvPr id="919409705" name=""/>
           <p:cNvSpPr txBox="1"/>
           <p:nvPr/>
         </p:nvSpPr>
@@ -16219,7 +16219,7 @@
       </p:sp>
       <p:sp>
         <p:nvSpPr>
-          <p:cNvPr id="333889952" name=""/>
+          <p:cNvPr id="1947187824" name=""/>
           <p:cNvSpPr/>
           <p:nvPr/>
         </p:nvSpPr>
@@ -16576,7 +16576,7 @@
       </p:sp>
       <p:sp>
         <p:nvSpPr>
-          <p:cNvPr id="1590548408" name=""/>
+          <p:cNvPr id="1938988731" name=""/>
           <p:cNvSpPr txBox="1"/>
           <p:nvPr/>
         </p:nvSpPr>
@@ -16909,7 +16909,7 @@
       </p:sp>
       <p:sp>
         <p:nvSpPr>
-          <p:cNvPr id="1951485354" name=""/>
+          <p:cNvPr id="1697553831" name=""/>
           <p:cNvSpPr txBox="1"/>
           <p:nvPr/>
         </p:nvSpPr>
@@ -17271,7 +17271,7 @@
       </p:grpSpPr>
       <p:sp>
         <p:nvSpPr>
-          <p:cNvPr id="1195098971" name="TextBox 1"/>
+          <p:cNvPr id="543154523" name="TextBox 1"/>
           <p:cNvSpPr txBox="1"/>
           <p:nvPr/>
         </p:nvSpPr>
@@ -17306,7 +17306,7 @@
       </p:sp>
       <p:sp>
         <p:nvSpPr>
-          <p:cNvPr id="1832122857" name="TextBox 2"/>
+          <p:cNvPr id="21635582" name="TextBox 2"/>
           <p:cNvSpPr txBox="1"/>
           <p:nvPr/>
         </p:nvSpPr>
@@ -18321,7 +18321,7 @@
       </p:sp>
       <p:sp>
         <p:nvSpPr>
-          <p:cNvPr id="1312203943" name="TextBox 5"/>
+          <p:cNvPr id="516357111" name="TextBox 5"/>
           <p:cNvSpPr txBox="1"/>
           <p:nvPr/>
         </p:nvSpPr>
@@ -18389,7 +18389,7 @@
       </p:grpSpPr>
       <p:sp>
         <p:nvSpPr>
-          <p:cNvPr id="607020346" name="TextBox 1"/>
+          <p:cNvPr id="1529626882" name="TextBox 1"/>
           <p:cNvSpPr txBox="1"/>
           <p:nvPr/>
         </p:nvSpPr>
@@ -18448,14 +18448,14 @@
       </p:sp>
       <p:sp>
         <p:nvSpPr>
-          <p:cNvPr id="1336185141" name="TextBox 2"/>
+          <p:cNvPr id="169436856" name="TextBox 2"/>
           <p:cNvSpPr txBox="1"/>
           <p:nvPr/>
         </p:nvSpPr>
         <p:spPr bwMode="auto">
           <a:xfrm>
-            <a:off x="457199" y="1097280"/>
-            <a:ext cx="5505479" cy="4572360"/>
+            <a:off x="457198" y="1097280"/>
+            <a:ext cx="5506198" cy="4572234"/>
           </a:xfrm>
           <a:prstGeom prst="rect">
             <a:avLst/>
@@ -18709,14 +18709,32 @@
               </a:spcAft>
               <a:defRPr/>
             </a:pPr>
-            <a:r>
-              <a:rPr sz="1800" b="0" i="1">
-                <a:latin typeface="Liberation Serif"/>
-                <a:ea typeface="Liberation Serif"/>
-                <a:cs typeface="Liberation Serif"/>
-              </a:rPr>
-              <a:t>β</a:t>
-            </a:r>
+            <mc:AlternateContent xmlns:mc="http://schemas.openxmlformats.org/markup-compatibility/2006" xmlns:m="http://schemas.openxmlformats.org/officeDocument/2006/math">
+              <mc:Choice xmlns:a14="http://schemas.microsoft.com/office/drawing/2010/main" Requires="a14">
+                <a14:m>
+                  <m:oMathPara>
+                    <m:oMathParaPr/>
+                    <m:oMath>
+                      <m:r>
+                        <m:rPr>
+                          <m:sty m:val="p"/>
+                        </m:rPr>
+                        <a:rPr lang="en-US" sz="1800" u="none" strike="noStrike" cap="none" spc="0">
+                          <a:solidFill>
+                            <a:schemeClr val="tx1"/>
+                          </a:solidFill>
+                          <a:latin typeface="Cambria Math"/>
+                          <a:ea typeface="Cambria Math"/>
+                          <a:cs typeface="Cambria Math"/>
+                        </a:rPr>
+                        <m:t>β</m:t>
+                      </m:r>
+                    </m:oMath>
+                  </m:oMathPara>
+                </a14:m>
+              </mc:Choice>
+              <mc:Fallback/>
+            </mc:AlternateContent>
             <a:r>
               <a:rPr sz="1800" b="0" i="0">
                 <a:latin typeface="Liberation Serif"/>
@@ -18731,7 +18749,7 @@
       </p:sp>
       <p:sp>
         <p:nvSpPr>
-          <p:cNvPr id="1099771365" name="TextBox 3"/>
+          <p:cNvPr id="1422818175" name="TextBox 3"/>
           <p:cNvSpPr txBox="1"/>
           <p:nvPr/>
         </p:nvSpPr>
@@ -19012,7 +19030,7 @@
       </p:sp>
       <p:sp>
         <p:nvSpPr>
-          <p:cNvPr id="410996323" name="TextBox 5"/>
+          <p:cNvPr id="1276104454" name="TextBox 5"/>
           <p:cNvSpPr txBox="1"/>
           <p:nvPr/>
         </p:nvSpPr>
@@ -19047,7 +19065,7 @@
       </p:sp>
       <p:sp>
         <p:nvSpPr>
-          <p:cNvPr id="1095523705" name=""/>
+          <p:cNvPr id="1943480462" name=""/>
           <p:cNvSpPr/>
           <p:nvPr/>
         </p:nvSpPr>
@@ -19169,14 +19187,14 @@
       </p:sp>
       <p:sp>
         <p:nvSpPr>
-          <p:cNvPr id="246124196" name=""/>
+          <p:cNvPr id="1256778929" name=""/>
           <p:cNvSpPr/>
           <p:nvPr/>
         </p:nvSpPr>
         <p:spPr bwMode="auto">
           <a:xfrm>
-            <a:off x="509146" y="3105484"/>
-            <a:ext cx="1898312" cy="369235"/>
+            <a:off x="476214" y="3105483"/>
+            <a:ext cx="1964894" cy="381699"/>
           </a:xfrm>
           <a:prstGeom prst="rect">
             <a:avLst/>
@@ -19307,7 +19325,7 @@
                         <m:e>
                           <m:r>
                             <m:rPr>
-                              <m:sty m:val="i"/>
+                              <m:sty m:val="p"/>
                             </m:rPr>
                             <a:rPr lang="en-US" sz="1800" u="none" strike="noStrike" cap="none" spc="0">
                               <a:solidFill>
@@ -19351,14 +19369,14 @@
       </p:sp>
       <p:sp>
         <p:nvSpPr>
-          <p:cNvPr id="1445801736" name=""/>
+          <p:cNvPr id="1008336205" name=""/>
           <p:cNvSpPr txBox="1"/>
           <p:nvPr/>
         </p:nvSpPr>
         <p:spPr bwMode="auto">
           <a:xfrm rot="0" flipH="0" flipV="0">
-            <a:off x="2406919" y="3105484"/>
-            <a:ext cx="1907640" cy="369235"/>
+            <a:off x="2406918" y="3105483"/>
+            <a:ext cx="1909439" cy="381699"/>
           </a:xfrm>
           <a:prstGeom prst="rect">
             <a:avLst/>
@@ -19487,7 +19505,7 @@
                         <m:e>
                           <m:r>
                             <m:rPr>
-                              <m:sty m:val="i"/>
+                              <m:sty m:val="p"/>
                             </m:rPr>
                             <a:rPr lang="en-US" sz="1800" u="none" strike="noStrike" cap="none" spc="0">
                               <a:solidFill>
@@ -19525,7 +19543,7 @@
       </p:sp>
       <p:sp>
         <p:nvSpPr>
-          <p:cNvPr id="1171229499" name=""/>
+          <p:cNvPr id="1013169703" name=""/>
           <p:cNvSpPr/>
           <p:nvPr/>
         </p:nvSpPr>
@@ -19601,7 +19619,7 @@
       </p:sp>
       <p:sp>
         <p:nvSpPr>
-          <p:cNvPr id="704377130" name=""/>
+          <p:cNvPr id="1156262411" name=""/>
           <p:cNvSpPr/>
           <p:nvPr/>
         </p:nvSpPr>
@@ -19745,7 +19763,7 @@
       </p:sp>
       <p:sp>
         <p:nvSpPr>
-          <p:cNvPr id="260427214" name=""/>
+          <p:cNvPr id="116942727" name=""/>
           <p:cNvSpPr/>
           <p:nvPr/>
         </p:nvSpPr>
@@ -19903,7 +19921,7 @@
       </p:sp>
       <p:sp>
         <p:nvSpPr>
-          <p:cNvPr id="373142629" name=""/>
+          <p:cNvPr id="11678716" name=""/>
           <p:cNvSpPr/>
           <p:nvPr/>
         </p:nvSpPr>
@@ -20116,14 +20134,14 @@
       </p:sp>
       <p:sp>
         <p:nvSpPr>
-          <p:cNvPr id="1345197263" name=""/>
+          <p:cNvPr id="201397226" name=""/>
           <p:cNvSpPr txBox="1"/>
           <p:nvPr/>
         </p:nvSpPr>
         <p:spPr bwMode="auto">
           <a:xfrm rot="0" flipH="0" flipV="0">
             <a:off x="7806546" y="3286986"/>
-            <a:ext cx="2366171" cy="369235"/>
+            <a:ext cx="2366170" cy="369235"/>
           </a:xfrm>
           <a:prstGeom prst="rect">
             <a:avLst/>
@@ -20327,7 +20345,7 @@
       </p:sp>
       <p:sp>
         <p:nvSpPr>
-          <p:cNvPr id="1111324783" name=""/>
+          <p:cNvPr id="1195495583" name=""/>
           <p:cNvSpPr txBox="1"/>
           <p:nvPr/>
         </p:nvSpPr>
